--- a/lect_MLOps_AIOps.pptx
+++ b/lect_MLOps_AIOps.pptx
@@ -5,7 +5,7 @@
     <p:sldMasterId id="2147483648" r:id="rId1"/>
   </p:sldMasterIdLst>
   <p:notesMasterIdLst>
-    <p:notesMasterId r:id="rId9"/>
+    <p:notesMasterId r:id="rId11"/>
   </p:notesMasterIdLst>
   <p:sldIdLst>
     <p:sldId id="340" r:id="rId2"/>
@@ -15,6 +15,8 @@
     <p:sldId id="337" r:id="rId6"/>
     <p:sldId id="338" r:id="rId7"/>
     <p:sldId id="339" r:id="rId8"/>
+    <p:sldId id="341" r:id="rId9"/>
+    <p:sldId id="256" r:id="rId10"/>
   </p:sldIdLst>
   <p:sldSz cx="12192000" cy="6858000"/>
   <p:notesSz cx="6858000" cy="9144000"/>
@@ -203,7 +205,7 @@
           <a:p>
             <a:fld id="{C2E15B94-D9E4-E149-8081-23A720D1EE5F}" type="datetimeFigureOut">
               <a:rPr lang="en-US" smtClean="0"/>
-              <a:t>5/29/21</a:t>
+              <a:t>6/3/21</a:t>
             </a:fld>
             <a:endParaRPr lang="en-US"/>
           </a:p>
@@ -617,7 +619,7 @@
           <a:p>
             <a:fld id="{FBD852D7-E694-214E-8A12-510E0A0329D2}" type="datetimeFigureOut">
               <a:rPr lang="en-US" smtClean="0"/>
-              <a:t>5/29/21</a:t>
+              <a:t>6/3/21</a:t>
             </a:fld>
             <a:endParaRPr lang="en-US"/>
           </a:p>
@@ -815,7 +817,7 @@
           <a:p>
             <a:fld id="{FBD852D7-E694-214E-8A12-510E0A0329D2}" type="datetimeFigureOut">
               <a:rPr lang="en-US" smtClean="0"/>
-              <a:t>5/29/21</a:t>
+              <a:t>6/3/21</a:t>
             </a:fld>
             <a:endParaRPr lang="en-US"/>
           </a:p>
@@ -1023,7 +1025,7 @@
           <a:p>
             <a:fld id="{FBD852D7-E694-214E-8A12-510E0A0329D2}" type="datetimeFigureOut">
               <a:rPr lang="en-US" smtClean="0"/>
-              <a:t>5/29/21</a:t>
+              <a:t>6/3/21</a:t>
             </a:fld>
             <a:endParaRPr lang="en-US"/>
           </a:p>
@@ -1221,7 +1223,7 @@
           <a:p>
             <a:fld id="{FBD852D7-E694-214E-8A12-510E0A0329D2}" type="datetimeFigureOut">
               <a:rPr lang="en-US" smtClean="0"/>
-              <a:t>5/29/21</a:t>
+              <a:t>6/3/21</a:t>
             </a:fld>
             <a:endParaRPr lang="en-US"/>
           </a:p>
@@ -1496,7 +1498,7 @@
           <a:p>
             <a:fld id="{FBD852D7-E694-214E-8A12-510E0A0329D2}" type="datetimeFigureOut">
               <a:rPr lang="en-US" smtClean="0"/>
-              <a:t>5/29/21</a:t>
+              <a:t>6/3/21</a:t>
             </a:fld>
             <a:endParaRPr lang="en-US"/>
           </a:p>
@@ -1761,7 +1763,7 @@
           <a:p>
             <a:fld id="{FBD852D7-E694-214E-8A12-510E0A0329D2}" type="datetimeFigureOut">
               <a:rPr lang="en-US" smtClean="0"/>
-              <a:t>5/29/21</a:t>
+              <a:t>6/3/21</a:t>
             </a:fld>
             <a:endParaRPr lang="en-US"/>
           </a:p>
@@ -2173,7 +2175,7 @@
           <a:p>
             <a:fld id="{FBD852D7-E694-214E-8A12-510E0A0329D2}" type="datetimeFigureOut">
               <a:rPr lang="en-US" smtClean="0"/>
-              <a:t>5/29/21</a:t>
+              <a:t>6/3/21</a:t>
             </a:fld>
             <a:endParaRPr lang="en-US"/>
           </a:p>
@@ -2314,7 +2316,7 @@
           <a:p>
             <a:fld id="{FBD852D7-E694-214E-8A12-510E0A0329D2}" type="datetimeFigureOut">
               <a:rPr lang="en-US" smtClean="0"/>
-              <a:t>5/29/21</a:t>
+              <a:t>6/3/21</a:t>
             </a:fld>
             <a:endParaRPr lang="en-US"/>
           </a:p>
@@ -2427,7 +2429,7 @@
           <a:p>
             <a:fld id="{FBD852D7-E694-214E-8A12-510E0A0329D2}" type="datetimeFigureOut">
               <a:rPr lang="en-US" smtClean="0"/>
-              <a:t>5/29/21</a:t>
+              <a:t>6/3/21</a:t>
             </a:fld>
             <a:endParaRPr lang="en-US"/>
           </a:p>
@@ -2738,7 +2740,7 @@
           <a:p>
             <a:fld id="{FBD852D7-E694-214E-8A12-510E0A0329D2}" type="datetimeFigureOut">
               <a:rPr lang="en-US" smtClean="0"/>
-              <a:t>5/29/21</a:t>
+              <a:t>6/3/21</a:t>
             </a:fld>
             <a:endParaRPr lang="en-US"/>
           </a:p>
@@ -3026,7 +3028,7 @@
           <a:p>
             <a:fld id="{FBD852D7-E694-214E-8A12-510E0A0329D2}" type="datetimeFigureOut">
               <a:rPr lang="en-US" smtClean="0"/>
-              <a:t>5/29/21</a:t>
+              <a:t>6/3/21</a:t>
             </a:fld>
             <a:endParaRPr lang="en-US"/>
           </a:p>
@@ -3267,7 +3269,7 @@
           <a:p>
             <a:fld id="{FBD852D7-E694-214E-8A12-510E0A0329D2}" type="datetimeFigureOut">
               <a:rPr lang="en-US" smtClean="0"/>
-              <a:t>5/29/21</a:t>
+              <a:t>6/3/21</a:t>
             </a:fld>
             <a:endParaRPr lang="en-US"/>
           </a:p>
@@ -5296,6 +5298,1428 @@
     <p:extLst>
       <p:ext uri="{BB962C8B-B14F-4D97-AF65-F5344CB8AC3E}">
         <p14:creationId xmlns:p14="http://schemas.microsoft.com/office/powerpoint/2010/main" val="1178230015"/>
+      </p:ext>
+    </p:extLst>
+  </p:cSld>
+  <p:clrMapOvr>
+    <a:masterClrMapping/>
+  </p:clrMapOvr>
+</p:sld>
+</file>
+
+<file path=ppt/slides/slide8.xml><?xml version="1.0" encoding="utf-8"?>
+<p:sld xmlns:a="http://schemas.openxmlformats.org/drawingml/2006/main" xmlns:r="http://schemas.openxmlformats.org/officeDocument/2006/relationships" xmlns:p="http://schemas.openxmlformats.org/presentationml/2006/main">
+  <p:cSld>
+    <p:spTree>
+      <p:nvGrpSpPr>
+        <p:cNvPr id="1" name=""/>
+        <p:cNvGrpSpPr/>
+        <p:nvPr/>
+      </p:nvGrpSpPr>
+      <p:grpSpPr>
+        <a:xfrm>
+          <a:off x="0" y="0"/>
+          <a:ext cx="0" cy="0"/>
+          <a:chOff x="0" y="0"/>
+          <a:chExt cx="0" cy="0"/>
+        </a:xfrm>
+      </p:grpSpPr>
+      <p:sp>
+        <p:nvSpPr>
+          <p:cNvPr id="2" name="TextBox 1">
+            <a:extLst>
+              <a:ext uri="{FF2B5EF4-FFF2-40B4-BE49-F238E27FC236}">
+                <a16:creationId xmlns:a16="http://schemas.microsoft.com/office/drawing/2014/main" id="{E9711458-5464-EC44-9A94-A1F98AA8F935}"/>
+              </a:ext>
+            </a:extLst>
+          </p:cNvPr>
+          <p:cNvSpPr txBox="1"/>
+          <p:nvPr/>
+        </p:nvSpPr>
+        <p:spPr>
+          <a:xfrm>
+            <a:off x="89337" y="855515"/>
+            <a:ext cx="4729243" cy="2739211"/>
+          </a:xfrm>
+          <a:prstGeom prst="rect">
+            <a:avLst/>
+          </a:prstGeom>
+          <a:noFill/>
+        </p:spPr>
+        <p:txBody>
+          <a:bodyPr wrap="square" rtlCol="0">
+            <a:spAutoFit/>
+          </a:bodyPr>
+          <a:lstStyle/>
+          <a:p>
+            <a:r>
+              <a:rPr lang="en-US" sz="1600" b="1" dirty="0">
+                <a:solidFill>
+                  <a:srgbClr val="FF0000"/>
+                </a:solidFill>
+              </a:rPr>
+              <a:t>Determined AI</a:t>
+            </a:r>
+            <a:r>
+              <a:rPr lang="en-US" sz="1600" dirty="0"/>
+              <a:t> - </a:t>
+            </a:r>
+            <a:r>
+              <a:rPr lang="en-US" sz="1600" b="1" dirty="0">
+                <a:solidFill>
+                  <a:srgbClr val="00B050"/>
+                </a:solidFill>
+              </a:rPr>
+              <a:t>Open-Source framework</a:t>
+            </a:r>
+            <a:r>
+              <a:rPr lang="en-US" sz="1600" dirty="0"/>
+              <a:t> for </a:t>
+            </a:r>
+          </a:p>
+          <a:p>
+            <a:r>
+              <a:rPr lang="en-US" sz="1600" b="1" dirty="0">
+                <a:solidFill>
+                  <a:srgbClr val="0070C0"/>
+                </a:solidFill>
+              </a:rPr>
+              <a:t>distributed training</a:t>
+            </a:r>
+            <a:r>
+              <a:rPr lang="en-US" sz="1600" dirty="0"/>
+              <a:t> of </a:t>
+            </a:r>
+            <a:r>
+              <a:rPr lang="en-US" sz="1600" b="1" dirty="0">
+                <a:solidFill>
+                  <a:schemeClr val="accent2">
+                    <a:lumMod val="75000"/>
+                  </a:schemeClr>
+                </a:solidFill>
+              </a:rPr>
+              <a:t>Deep Learning</a:t>
+            </a:r>
+            <a:r>
+              <a:rPr lang="en-US" sz="1600" dirty="0"/>
+              <a:t> models.</a:t>
+            </a:r>
+          </a:p>
+          <a:p>
+            <a:endParaRPr lang="en-US" sz="1600" dirty="0"/>
+          </a:p>
+          <a:p>
+            <a:r>
+              <a:rPr lang="en-US" sz="1600" dirty="0"/>
+              <a:t>Whether you use </a:t>
+            </a:r>
+            <a:r>
+              <a:rPr lang="en-US" sz="1600" dirty="0" err="1"/>
+              <a:t>PyTorch</a:t>
+            </a:r>
+            <a:r>
+              <a:rPr lang="en-US" sz="1600" dirty="0"/>
+              <a:t> or </a:t>
+            </a:r>
+            <a:r>
+              <a:rPr lang="en-US" sz="1600" dirty="0" err="1"/>
+              <a:t>TensorFlow+Keras</a:t>
+            </a:r>
+            <a:r>
+              <a:rPr lang="en-US" sz="1600" dirty="0"/>
+              <a:t>,</a:t>
+            </a:r>
+          </a:p>
+          <a:p>
+            <a:r>
+              <a:rPr lang="en-US" sz="1600" dirty="0"/>
+              <a:t>you can speed up 20-100 times without</a:t>
+            </a:r>
+          </a:p>
+          <a:p>
+            <a:r>
+              <a:rPr lang="en-US" sz="1600" dirty="0"/>
+              <a:t>changing your code.</a:t>
+            </a:r>
+          </a:p>
+          <a:p>
+            <a:endParaRPr lang="en-US" sz="1600" dirty="0"/>
+          </a:p>
+          <a:p>
+            <a:pPr marL="285750" indent="-285750">
+              <a:buFont typeface="Arial" panose="020B0604020202020204" pitchFamily="34" charset="0"/>
+              <a:buChar char="•"/>
+            </a:pPr>
+            <a:r>
+              <a:rPr lang="en-US" sz="1200" dirty="0">
+                <a:hlinkClick r:id="rId2"/>
+              </a:rPr>
+              <a:t>https://www.determined.ai/</a:t>
+            </a:r>
+            <a:r>
+              <a:rPr lang="en-US" sz="1200" dirty="0"/>
+              <a:t> </a:t>
+            </a:r>
+          </a:p>
+          <a:p>
+            <a:pPr marL="285750" indent="-285750">
+              <a:buFont typeface="Arial" panose="020B0604020202020204" pitchFamily="34" charset="0"/>
+              <a:buChar char="•"/>
+            </a:pPr>
+            <a:r>
+              <a:rPr lang="en-US" sz="1200" dirty="0">
+                <a:hlinkClick r:id="rId3"/>
+              </a:rPr>
+              <a:t>https://www.determined.ai/product</a:t>
+            </a:r>
+            <a:r>
+              <a:rPr lang="en-US" sz="1200" dirty="0"/>
+              <a:t> </a:t>
+            </a:r>
+          </a:p>
+          <a:p>
+            <a:pPr marL="285750" indent="-285750">
+              <a:buFont typeface="Arial" panose="020B0604020202020204" pitchFamily="34" charset="0"/>
+              <a:buChar char="•"/>
+            </a:pPr>
+            <a:r>
+              <a:rPr lang="en-US" sz="1200" dirty="0">
+                <a:hlinkClick r:id="rId4"/>
+              </a:rPr>
+              <a:t>https://github.com/determined-ai/determined</a:t>
+            </a:r>
+            <a:r>
+              <a:rPr lang="en-US" sz="1200" dirty="0"/>
+              <a:t> </a:t>
+            </a:r>
+          </a:p>
+          <a:p>
+            <a:pPr marL="285750" indent="-285750">
+              <a:buFont typeface="Arial" panose="020B0604020202020204" pitchFamily="34" charset="0"/>
+              <a:buChar char="•"/>
+            </a:pPr>
+            <a:r>
+              <a:rPr lang="en-US" sz="1200" dirty="0">
+                <a:hlinkClick r:id="rId5"/>
+              </a:rPr>
+              <a:t>https://www.determined.ai/blog/production-training-pipelines-with-determined-and-kubeflow</a:t>
+            </a:r>
+            <a:r>
+              <a:rPr lang="en-US" sz="1200" dirty="0"/>
+              <a:t>  </a:t>
+            </a:r>
+          </a:p>
+        </p:txBody>
+      </p:sp>
+      <p:sp>
+        <p:nvSpPr>
+          <p:cNvPr id="3" name="TextBox 2">
+            <a:extLst>
+              <a:ext uri="{FF2B5EF4-FFF2-40B4-BE49-F238E27FC236}">
+                <a16:creationId xmlns:a16="http://schemas.microsoft.com/office/drawing/2014/main" id="{01689735-86A5-9F43-B47B-FC17E2410682}"/>
+              </a:ext>
+            </a:extLst>
+          </p:cNvPr>
+          <p:cNvSpPr txBox="1"/>
+          <p:nvPr/>
+        </p:nvSpPr>
+        <p:spPr>
+          <a:xfrm>
+            <a:off x="89337" y="71794"/>
+            <a:ext cx="3184634" cy="523220"/>
+          </a:xfrm>
+          <a:prstGeom prst="rect">
+            <a:avLst/>
+          </a:prstGeom>
+          <a:noFill/>
+        </p:spPr>
+        <p:txBody>
+          <a:bodyPr wrap="square" rtlCol="0">
+            <a:spAutoFit/>
+          </a:bodyPr>
+          <a:lstStyle/>
+          <a:p>
+            <a:r>
+              <a:rPr lang="en-US" sz="2800" b="1" dirty="0">
+                <a:latin typeface="Arial" panose="020B0604020202020204" pitchFamily="34" charset="0"/>
+                <a:cs typeface="Arial" panose="020B0604020202020204" pitchFamily="34" charset="0"/>
+              </a:rPr>
+              <a:t>Determined AI</a:t>
+            </a:r>
+          </a:p>
+        </p:txBody>
+      </p:sp>
+      <p:pic>
+        <p:nvPicPr>
+          <p:cNvPr id="1034" name="Picture 10" descr="Open source machine learning platform Kubeflow reaches version 1.0 |  VentureBeat">
+            <a:extLst>
+              <a:ext uri="{FF2B5EF4-FFF2-40B4-BE49-F238E27FC236}">
+                <a16:creationId xmlns:a16="http://schemas.microsoft.com/office/drawing/2014/main" id="{BFB6DC97-18F4-044A-B799-92279F7334E5}"/>
+              </a:ext>
+            </a:extLst>
+          </p:cNvPr>
+          <p:cNvPicPr>
+            <a:picLocks noChangeAspect="1" noChangeArrowheads="1"/>
+          </p:cNvPicPr>
+          <p:nvPr/>
+        </p:nvPicPr>
+        <p:blipFill rotWithShape="1">
+          <a:blip r:embed="rId6" cstate="email">
+            <a:extLst>
+              <a:ext uri="{28A0092B-C50C-407E-A947-70E740481C1C}">
+                <a14:useLocalDpi xmlns:a14="http://schemas.microsoft.com/office/drawing/2010/main"/>
+              </a:ext>
+            </a:extLst>
+          </a:blip>
+          <a:srcRect/>
+          <a:stretch/>
+        </p:blipFill>
+        <p:spPr bwMode="auto">
+          <a:xfrm>
+            <a:off x="4020439" y="4369987"/>
+            <a:ext cx="1807779" cy="412984"/>
+          </a:xfrm>
+          <a:prstGeom prst="rect">
+            <a:avLst/>
+          </a:prstGeom>
+          <a:noFill/>
+          <a:extLst>
+            <a:ext uri="{909E8E84-426E-40DD-AFC4-6F175D3DCCD1}">
+              <a14:hiddenFill xmlns:a14="http://schemas.microsoft.com/office/drawing/2010/main">
+                <a:solidFill>
+                  <a:srgbClr val="FFFFFF"/>
+                </a:solidFill>
+              </a14:hiddenFill>
+            </a:ext>
+          </a:extLst>
+        </p:spPr>
+      </p:pic>
+      <p:sp>
+        <p:nvSpPr>
+          <p:cNvPr id="9" name="TextBox 8">
+            <a:extLst>
+              <a:ext uri="{FF2B5EF4-FFF2-40B4-BE49-F238E27FC236}">
+                <a16:creationId xmlns:a16="http://schemas.microsoft.com/office/drawing/2014/main" id="{E6265EFE-0C48-5740-BF27-CE3450E50AAB}"/>
+              </a:ext>
+            </a:extLst>
+          </p:cNvPr>
+          <p:cNvSpPr txBox="1"/>
+          <p:nvPr/>
+        </p:nvSpPr>
+        <p:spPr>
+          <a:xfrm>
+            <a:off x="6102847" y="3656761"/>
+            <a:ext cx="5383532" cy="2800767"/>
+          </a:xfrm>
+          <a:prstGeom prst="rect">
+            <a:avLst/>
+          </a:prstGeom>
+          <a:noFill/>
+        </p:spPr>
+        <p:txBody>
+          <a:bodyPr wrap="square" rtlCol="0">
+            <a:spAutoFit/>
+          </a:bodyPr>
+          <a:lstStyle/>
+          <a:p>
+            <a:r>
+              <a:rPr lang="en-US" sz="1600" b="1" dirty="0">
+                <a:solidFill>
+                  <a:srgbClr val="00B050"/>
+                </a:solidFill>
+              </a:rPr>
+              <a:t>The whole production system may be built using </a:t>
+            </a:r>
+          </a:p>
+          <a:p>
+            <a:r>
+              <a:rPr lang="en-US" sz="1600" b="1" dirty="0">
+                <a:solidFill>
+                  <a:srgbClr val="00B050"/>
+                </a:solidFill>
+              </a:rPr>
+              <a:t>three open-source technologies:</a:t>
+            </a:r>
+          </a:p>
+          <a:p>
+            <a:endParaRPr lang="en-US" sz="1600" dirty="0"/>
+          </a:p>
+          <a:p>
+            <a:pPr marL="285750" indent="-285750">
+              <a:buFont typeface="Arial" panose="020B0604020202020204" pitchFamily="34" charset="0"/>
+              <a:buChar char="•"/>
+            </a:pPr>
+            <a:r>
+              <a:rPr lang="en-US" sz="1600" b="1" dirty="0">
+                <a:solidFill>
+                  <a:srgbClr val="FF0000"/>
+                </a:solidFill>
+              </a:rPr>
+              <a:t>Kubeflow Pipelines</a:t>
+            </a:r>
+            <a:r>
+              <a:rPr lang="en-US" sz="1600" dirty="0"/>
+              <a:t> - for ML pipelines</a:t>
+            </a:r>
+            <a:br>
+              <a:rPr lang="en-US" sz="1600" dirty="0"/>
+            </a:br>
+            <a:r>
+              <a:rPr lang="en-US" sz="1600" dirty="0"/>
+              <a:t> - </a:t>
+            </a:r>
+            <a:r>
+              <a:rPr lang="en-US" sz="1600" dirty="0">
+                <a:hlinkClick r:id="rId7"/>
+              </a:rPr>
+              <a:t>https://www.kubeflow.org/</a:t>
+            </a:r>
+            <a:r>
+              <a:rPr lang="en-US" sz="1600" dirty="0"/>
+              <a:t>  </a:t>
+            </a:r>
+          </a:p>
+          <a:p>
+            <a:endParaRPr lang="en-US" sz="1600" dirty="0"/>
+          </a:p>
+          <a:p>
+            <a:pPr marL="285750" indent="-285750">
+              <a:buFont typeface="Arial" panose="020B0604020202020204" pitchFamily="34" charset="0"/>
+              <a:buChar char="•"/>
+            </a:pPr>
+            <a:r>
+              <a:rPr lang="en-US" sz="1600" b="1" dirty="0">
+                <a:solidFill>
+                  <a:srgbClr val="FF0000"/>
+                </a:solidFill>
+              </a:rPr>
+              <a:t>Determined AI</a:t>
+            </a:r>
+            <a:r>
+              <a:rPr lang="en-US" sz="1600" dirty="0"/>
+              <a:t> - for production-scale model training</a:t>
+            </a:r>
+            <a:br>
+              <a:rPr lang="en-US" sz="1600" dirty="0"/>
+            </a:br>
+            <a:r>
+              <a:rPr lang="en-US" sz="1600" dirty="0"/>
+              <a:t> - </a:t>
+            </a:r>
+            <a:r>
+              <a:rPr lang="en-US" sz="1600" dirty="0">
+                <a:hlinkClick r:id="rId2"/>
+              </a:rPr>
+              <a:t>https://www.determined.ai/</a:t>
+            </a:r>
+            <a:r>
+              <a:rPr lang="en-US" sz="1600" dirty="0"/>
+              <a:t>   </a:t>
+            </a:r>
+          </a:p>
+          <a:p>
+            <a:endParaRPr lang="en-US" sz="1600" dirty="0"/>
+          </a:p>
+          <a:p>
+            <a:pPr marL="285750" indent="-285750">
+              <a:buFont typeface="Arial" panose="020B0604020202020204" pitchFamily="34" charset="0"/>
+              <a:buChar char="•"/>
+            </a:pPr>
+            <a:r>
+              <a:rPr lang="en-US" sz="1600" b="1" dirty="0">
+                <a:solidFill>
+                  <a:srgbClr val="FF0000"/>
+                </a:solidFill>
+              </a:rPr>
+              <a:t>Seldon Core</a:t>
+            </a:r>
+            <a:r>
+              <a:rPr lang="en-US" sz="1600" dirty="0"/>
+              <a:t> - for model deployment and serving</a:t>
+            </a:r>
+            <a:br>
+              <a:rPr lang="en-US" sz="1600" dirty="0"/>
+            </a:br>
+            <a:r>
+              <a:rPr lang="en-US" sz="1600" dirty="0"/>
+              <a:t> - </a:t>
+            </a:r>
+            <a:r>
+              <a:rPr lang="en-US" sz="1600" dirty="0">
+                <a:hlinkClick r:id="rId8"/>
+              </a:rPr>
+              <a:t>https://www.seldon.io/</a:t>
+            </a:r>
+            <a:r>
+              <a:rPr lang="en-US" sz="1600" dirty="0"/>
+              <a:t> </a:t>
+            </a:r>
+          </a:p>
+        </p:txBody>
+      </p:sp>
+      <p:pic>
+        <p:nvPicPr>
+          <p:cNvPr id="1036" name="Picture 12" descr="Seldon Core — seldon-core documentation">
+            <a:extLst>
+              <a:ext uri="{FF2B5EF4-FFF2-40B4-BE49-F238E27FC236}">
+                <a16:creationId xmlns:a16="http://schemas.microsoft.com/office/drawing/2014/main" id="{F0918C66-B563-E14A-8590-209F521067EE}"/>
+              </a:ext>
+            </a:extLst>
+          </p:cNvPr>
+          <p:cNvPicPr>
+            <a:picLocks noChangeAspect="1" noChangeArrowheads="1"/>
+          </p:cNvPicPr>
+          <p:nvPr/>
+        </p:nvPicPr>
+        <p:blipFill rotWithShape="1">
+          <a:blip r:embed="rId9" cstate="email">
+            <a:extLst>
+              <a:ext uri="{28A0092B-C50C-407E-A947-70E740481C1C}">
+                <a14:useLocalDpi xmlns:a14="http://schemas.microsoft.com/office/drawing/2010/main"/>
+              </a:ext>
+            </a:extLst>
+          </a:blip>
+          <a:srcRect/>
+          <a:stretch/>
+        </p:blipFill>
+        <p:spPr bwMode="auto">
+          <a:xfrm>
+            <a:off x="4153404" y="5864193"/>
+            <a:ext cx="1736334" cy="420420"/>
+          </a:xfrm>
+          <a:prstGeom prst="rect">
+            <a:avLst/>
+          </a:prstGeom>
+          <a:noFill/>
+          <a:extLst>
+            <a:ext uri="{909E8E84-426E-40DD-AFC4-6F175D3DCCD1}">
+              <a14:hiddenFill xmlns:a14="http://schemas.microsoft.com/office/drawing/2010/main">
+                <a:solidFill>
+                  <a:srgbClr val="FFFFFF"/>
+                </a:solidFill>
+              </a14:hiddenFill>
+            </a:ext>
+          </a:extLst>
+        </p:spPr>
+      </p:pic>
+      <p:pic>
+        <p:nvPicPr>
+          <p:cNvPr id="6" name="Picture 5">
+            <a:extLst>
+              <a:ext uri="{FF2B5EF4-FFF2-40B4-BE49-F238E27FC236}">
+                <a16:creationId xmlns:a16="http://schemas.microsoft.com/office/drawing/2014/main" id="{EDA75403-9DE1-1A4A-AB57-39B9B8FDBFA7}"/>
+              </a:ext>
+            </a:extLst>
+          </p:cNvPr>
+          <p:cNvPicPr>
+            <a:picLocks noChangeAspect="1"/>
+          </p:cNvPicPr>
+          <p:nvPr/>
+        </p:nvPicPr>
+        <p:blipFill>
+          <a:blip r:embed="rId10"/>
+          <a:stretch>
+            <a:fillRect/>
+          </a:stretch>
+        </p:blipFill>
+        <p:spPr>
+          <a:xfrm>
+            <a:off x="3027095" y="71794"/>
+            <a:ext cx="774700" cy="609600"/>
+          </a:xfrm>
+          <a:prstGeom prst="rect">
+            <a:avLst/>
+          </a:prstGeom>
+        </p:spPr>
+      </p:pic>
+      <p:pic>
+        <p:nvPicPr>
+          <p:cNvPr id="13" name="Picture 12">
+            <a:extLst>
+              <a:ext uri="{FF2B5EF4-FFF2-40B4-BE49-F238E27FC236}">
+                <a16:creationId xmlns:a16="http://schemas.microsoft.com/office/drawing/2014/main" id="{67BB2473-967A-6641-A0C2-80DC11E7D829}"/>
+              </a:ext>
+            </a:extLst>
+          </p:cNvPr>
+          <p:cNvPicPr>
+            <a:picLocks noChangeAspect="1"/>
+          </p:cNvPicPr>
+          <p:nvPr/>
+        </p:nvPicPr>
+        <p:blipFill>
+          <a:blip r:embed="rId10"/>
+          <a:stretch>
+            <a:fillRect/>
+          </a:stretch>
+        </p:blipFill>
+        <p:spPr>
+          <a:xfrm>
+            <a:off x="4634221" y="5018782"/>
+            <a:ext cx="774700" cy="609600"/>
+          </a:xfrm>
+          <a:prstGeom prst="rect">
+            <a:avLst/>
+          </a:prstGeom>
+        </p:spPr>
+      </p:pic>
+    </p:spTree>
+    <p:extLst>
+      <p:ext uri="{BB962C8B-B14F-4D97-AF65-F5344CB8AC3E}">
+        <p14:creationId xmlns:p14="http://schemas.microsoft.com/office/powerpoint/2010/main" val="1491753838"/>
+      </p:ext>
+    </p:extLst>
+  </p:cSld>
+  <p:clrMapOvr>
+    <a:masterClrMapping/>
+  </p:clrMapOvr>
+</p:sld>
+</file>
+
+<file path=ppt/slides/slide9.xml><?xml version="1.0" encoding="utf-8"?>
+<p:sld xmlns:a="http://schemas.openxmlformats.org/drawingml/2006/main" xmlns:r="http://schemas.openxmlformats.org/officeDocument/2006/relationships" xmlns:p="http://schemas.openxmlformats.org/presentationml/2006/main">
+  <p:cSld>
+    <p:spTree>
+      <p:nvGrpSpPr>
+        <p:cNvPr id="1" name=""/>
+        <p:cNvGrpSpPr/>
+        <p:nvPr/>
+      </p:nvGrpSpPr>
+      <p:grpSpPr>
+        <a:xfrm>
+          <a:off x="0" y="0"/>
+          <a:ext cx="0" cy="0"/>
+          <a:chOff x="0" y="0"/>
+          <a:chExt cx="0" cy="0"/>
+        </a:xfrm>
+      </p:grpSpPr>
+      <p:sp>
+        <p:nvSpPr>
+          <p:cNvPr id="4" name="TextBox 3">
+            <a:extLst>
+              <a:ext uri="{FF2B5EF4-FFF2-40B4-BE49-F238E27FC236}">
+                <a16:creationId xmlns:a16="http://schemas.microsoft.com/office/drawing/2014/main" id="{33BD26C0-DED7-BF41-B97E-8FEAFA3645A0}"/>
+              </a:ext>
+            </a:extLst>
+          </p:cNvPr>
+          <p:cNvSpPr txBox="1"/>
+          <p:nvPr/>
+        </p:nvSpPr>
+        <p:spPr>
+          <a:xfrm>
+            <a:off x="0" y="0"/>
+            <a:ext cx="1882981" cy="523220"/>
+          </a:xfrm>
+          <a:prstGeom prst="rect">
+            <a:avLst/>
+          </a:prstGeom>
+          <a:noFill/>
+        </p:spPr>
+        <p:txBody>
+          <a:bodyPr wrap="square" rtlCol="0">
+            <a:spAutoFit/>
+          </a:bodyPr>
+          <a:lstStyle/>
+          <a:p>
+            <a:r>
+              <a:rPr lang="en-US" sz="2800" b="1" dirty="0"/>
+              <a:t>Kubeflow</a:t>
+            </a:r>
+          </a:p>
+        </p:txBody>
+      </p:sp>
+      <p:sp>
+        <p:nvSpPr>
+          <p:cNvPr id="5" name="TextBox 4">
+            <a:extLst>
+              <a:ext uri="{FF2B5EF4-FFF2-40B4-BE49-F238E27FC236}">
+                <a16:creationId xmlns:a16="http://schemas.microsoft.com/office/drawing/2014/main" id="{1C51C3A3-C28F-8D4D-9251-50834ADD32B2}"/>
+              </a:ext>
+            </a:extLst>
+          </p:cNvPr>
+          <p:cNvSpPr txBox="1"/>
+          <p:nvPr/>
+        </p:nvSpPr>
+        <p:spPr>
+          <a:xfrm>
+            <a:off x="0" y="432672"/>
+            <a:ext cx="7148945" cy="4832092"/>
+          </a:xfrm>
+          <a:prstGeom prst="rect">
+            <a:avLst/>
+          </a:prstGeom>
+          <a:noFill/>
+        </p:spPr>
+        <p:txBody>
+          <a:bodyPr wrap="square" rtlCol="0">
+            <a:spAutoFit/>
+          </a:bodyPr>
+          <a:lstStyle/>
+          <a:p>
+            <a:r>
+              <a:rPr lang="en-US" sz="1400" b="1" dirty="0">
+                <a:solidFill>
+                  <a:srgbClr val="FF0000"/>
+                </a:solidFill>
+              </a:rPr>
+              <a:t>Kubeflow</a:t>
+            </a:r>
+            <a:r>
+              <a:rPr lang="en-US" sz="1400" dirty="0"/>
+              <a:t> began as an internal Google project,</a:t>
+            </a:r>
+          </a:p>
+          <a:p>
+            <a:r>
+              <a:rPr lang="en-US" sz="1400" dirty="0"/>
+              <a:t>it is a simple a way to ran </a:t>
+            </a:r>
+            <a:r>
+              <a:rPr lang="en-US" sz="1400" b="1" dirty="0">
+                <a:solidFill>
+                  <a:srgbClr val="0070C0"/>
+                </a:solidFill>
+              </a:rPr>
+              <a:t>TensorFlow</a:t>
+            </a:r>
+            <a:r>
+              <a:rPr lang="en-US" sz="1400" dirty="0"/>
+              <a:t> on </a:t>
+            </a:r>
+            <a:r>
+              <a:rPr lang="en-US" sz="1400" b="1" dirty="0">
+                <a:solidFill>
+                  <a:srgbClr val="0070C0"/>
+                </a:solidFill>
+              </a:rPr>
+              <a:t>Kubernetes</a:t>
+            </a:r>
+            <a:r>
+              <a:rPr lang="en-US" sz="1400" dirty="0"/>
+              <a:t>.</a:t>
+            </a:r>
+          </a:p>
+          <a:p>
+            <a:r>
+              <a:rPr lang="en-US" sz="1400" dirty="0"/>
+              <a:t>Kubeflow was open sourced at </a:t>
+            </a:r>
+            <a:r>
+              <a:rPr lang="en-US" sz="1400" b="1" dirty="0" err="1">
+                <a:solidFill>
+                  <a:srgbClr val="0070C0"/>
+                </a:solidFill>
+              </a:rPr>
+              <a:t>Kubecon</a:t>
+            </a:r>
+            <a:r>
+              <a:rPr lang="en-US" sz="1400" dirty="0"/>
+              <a:t> conference (USA, December 2017).</a:t>
+            </a:r>
+          </a:p>
+          <a:p>
+            <a:r>
+              <a:rPr lang="en-US" sz="1400" dirty="0"/>
+              <a:t>Later it was expanded to be a multi-architecture, multi-cloud framework </a:t>
+            </a:r>
+          </a:p>
+          <a:p>
+            <a:r>
+              <a:rPr lang="en-US" sz="1400" dirty="0"/>
+              <a:t>for running entire ML (Machine Learning) pipelines.</a:t>
+            </a:r>
+          </a:p>
+          <a:p>
+            <a:endParaRPr lang="en-US" sz="1400" dirty="0"/>
+          </a:p>
+          <a:p>
+            <a:r>
+              <a:rPr lang="en-US" sz="1400" dirty="0"/>
+              <a:t>Purpose - to make training and deployments of </a:t>
+            </a:r>
+            <a:r>
+              <a:rPr lang="en-US" sz="1400" b="1" dirty="0">
+                <a:solidFill>
+                  <a:srgbClr val="0070C0"/>
+                </a:solidFill>
+              </a:rPr>
+              <a:t>ML</a:t>
+            </a:r>
+            <a:r>
+              <a:rPr lang="en-US" sz="1400" dirty="0"/>
+              <a:t> on </a:t>
+            </a:r>
+            <a:r>
+              <a:rPr lang="en-US" sz="1400" b="1" dirty="0">
+                <a:solidFill>
+                  <a:srgbClr val="0070C0"/>
+                </a:solidFill>
+              </a:rPr>
+              <a:t>Kubernetes</a:t>
+            </a:r>
+            <a:r>
+              <a:rPr lang="en-US" sz="1400" dirty="0"/>
+              <a:t> simple, portable and scalable.</a:t>
+            </a:r>
+          </a:p>
+          <a:p>
+            <a:r>
+              <a:rPr lang="en-US" sz="1400" dirty="0"/>
+              <a:t> </a:t>
+            </a:r>
+          </a:p>
+          <a:p>
+            <a:r>
+              <a:rPr lang="en-US" sz="1400" b="1" dirty="0">
+                <a:solidFill>
+                  <a:srgbClr val="FF0000"/>
+                </a:solidFill>
+              </a:rPr>
+              <a:t>Kubeflow</a:t>
+            </a:r>
+            <a:r>
+              <a:rPr lang="en-US" sz="1400" dirty="0"/>
+              <a:t> allows to: </a:t>
+            </a:r>
+          </a:p>
+          <a:p>
+            <a:pPr marL="285750" indent="-285750">
+              <a:buFont typeface="Arial" panose="020B0604020202020204" pitchFamily="34" charset="0"/>
+              <a:buChar char="•"/>
+            </a:pPr>
+            <a:r>
+              <a:rPr lang="en-US" sz="1400" dirty="0"/>
+              <a:t>do python coding in </a:t>
+            </a:r>
+            <a:r>
+              <a:rPr lang="en-US" sz="1400" dirty="0" err="1"/>
+              <a:t>Jupyter</a:t>
+            </a:r>
+            <a:r>
+              <a:rPr lang="en-US" sz="1400" dirty="0"/>
+              <a:t> notebooks</a:t>
+            </a:r>
+          </a:p>
+          <a:p>
+            <a:pPr marL="285750" indent="-285750">
+              <a:buFont typeface="Arial" panose="020B0604020202020204" pitchFamily="34" charset="0"/>
+              <a:buChar char="•"/>
+            </a:pPr>
+            <a:r>
+              <a:rPr lang="en-US" sz="1400" dirty="0"/>
+              <a:t>use popular training libraries and formats: TensorFlow, </a:t>
+            </a:r>
+            <a:r>
+              <a:rPr lang="en-US" sz="1400" dirty="0" err="1"/>
+              <a:t>PyTorch</a:t>
+            </a:r>
+            <a:r>
+              <a:rPr lang="en-US" sz="1400" dirty="0"/>
+              <a:t>, scikit-learn, </a:t>
+            </a:r>
+            <a:r>
+              <a:rPr lang="en-US" sz="1400" dirty="0" err="1"/>
+              <a:t>XGBoost</a:t>
+            </a:r>
+            <a:r>
+              <a:rPr lang="en-US" sz="1400" dirty="0"/>
+              <a:t>, ONNX</a:t>
+            </a:r>
+            <a:br>
+              <a:rPr lang="en-US" sz="1400" dirty="0"/>
+            </a:br>
+            <a:r>
+              <a:rPr lang="en-US" sz="1400" dirty="0"/>
+              <a:t>- </a:t>
+            </a:r>
+            <a:r>
+              <a:rPr lang="en-US" sz="1400" dirty="0">
+                <a:hlinkClick r:id="rId2"/>
+              </a:rPr>
+              <a:t>https://www.kubeflow.org/docs/components/serving/kfserving/</a:t>
+            </a:r>
+            <a:r>
+              <a:rPr lang="en-US" sz="1400" dirty="0"/>
+              <a:t> </a:t>
+            </a:r>
+          </a:p>
+          <a:p>
+            <a:pPr marL="285750" indent="-285750">
+              <a:buFont typeface="Arial" panose="020B0604020202020204" pitchFamily="34" charset="0"/>
+              <a:buChar char="•"/>
+            </a:pPr>
+            <a:r>
+              <a:rPr lang="en-US" sz="1400" dirty="0"/>
+              <a:t>run code efficiently and securely in Kubernetes, isolated namespaces</a:t>
+            </a:r>
+          </a:p>
+          <a:p>
+            <a:pPr marL="285750" indent="-285750">
+              <a:buFont typeface="Arial" panose="020B0604020202020204" pitchFamily="34" charset="0"/>
+              <a:buChar char="•"/>
+            </a:pPr>
+            <a:r>
+              <a:rPr lang="en-US" sz="1400" dirty="0"/>
+              <a:t>portability between your laptop, on-prem cluster, or any of major clouds</a:t>
+            </a:r>
+          </a:p>
+          <a:p>
+            <a:pPr marL="285750" indent="-285750">
+              <a:buFont typeface="Arial" panose="020B0604020202020204" pitchFamily="34" charset="0"/>
+              <a:buChar char="•"/>
+            </a:pPr>
+            <a:r>
+              <a:rPr lang="en-US" sz="1400" dirty="0"/>
+              <a:t>portability between teams </a:t>
+            </a:r>
+          </a:p>
+          <a:p>
+            <a:pPr marL="285750" indent="-285750">
+              <a:buFont typeface="Arial" panose="020B0604020202020204" pitchFamily="34" charset="0"/>
+              <a:buChar char="•"/>
+            </a:pPr>
+            <a:r>
+              <a:rPr lang="en-US" sz="1400" dirty="0"/>
+              <a:t>Kubeflow’s hyperparameter tuner (</a:t>
+            </a:r>
+            <a:r>
+              <a:rPr lang="en-US" sz="1400" b="1" dirty="0" err="1">
+                <a:solidFill>
+                  <a:srgbClr val="0070C0"/>
+                </a:solidFill>
+              </a:rPr>
+              <a:t>Katib</a:t>
+            </a:r>
+            <a:r>
+              <a:rPr lang="en-US" sz="1400" dirty="0"/>
+              <a:t>) saves days of training</a:t>
+            </a:r>
+          </a:p>
+          <a:p>
+            <a:pPr marL="285750" indent="-285750">
+              <a:buFont typeface="Arial" panose="020B0604020202020204" pitchFamily="34" charset="0"/>
+              <a:buChar char="•"/>
+            </a:pPr>
+            <a:r>
+              <a:rPr lang="en-US" sz="1400" b="1" dirty="0">
+                <a:solidFill>
+                  <a:srgbClr val="0070C0"/>
+                </a:solidFill>
+              </a:rPr>
+              <a:t>Kubeflow Pipelines</a:t>
+            </a:r>
+            <a:r>
+              <a:rPr lang="en-US" sz="1400" dirty="0"/>
+              <a:t> - build ML workflows for integration and deployment</a:t>
+            </a:r>
+          </a:p>
+          <a:p>
+            <a:r>
+              <a:rPr lang="en-US" sz="1400" dirty="0"/>
+              <a:t> </a:t>
+            </a:r>
+          </a:p>
+          <a:p>
+            <a:r>
+              <a:rPr lang="en-US" sz="1400" dirty="0"/>
+              <a:t>- </a:t>
+            </a:r>
+            <a:r>
+              <a:rPr lang="en-US" sz="1400" dirty="0">
+                <a:hlinkClick r:id="rId3"/>
+              </a:rPr>
+              <a:t>https://github.com/kubeflow/kubeflow/blob/master/ROADMAP.md</a:t>
+            </a:r>
+            <a:r>
+              <a:rPr lang="en-US" sz="1400" dirty="0"/>
+              <a:t> </a:t>
+            </a:r>
+          </a:p>
+          <a:p>
+            <a:r>
+              <a:rPr lang="en-US" sz="1400" dirty="0"/>
+              <a:t>- </a:t>
+            </a:r>
+            <a:r>
+              <a:rPr lang="en-US" sz="1400" dirty="0">
+                <a:hlinkClick r:id="rId4"/>
+              </a:rPr>
+              <a:t>https://www.kubeflow.org/docs/about/use-cases/</a:t>
+            </a:r>
+            <a:r>
+              <a:rPr lang="en-US" sz="1400" dirty="0"/>
+              <a:t> </a:t>
+            </a:r>
+          </a:p>
+          <a:p>
+            <a:r>
+              <a:rPr lang="en-US" sz="1400" dirty="0"/>
+              <a:t>- </a:t>
+            </a:r>
+            <a:r>
+              <a:rPr lang="en-US" sz="1400" dirty="0">
+                <a:hlinkClick r:id="rId5"/>
+              </a:rPr>
+              <a:t>https://en.wikipedia.org/wiki/Kubeflow</a:t>
+            </a:r>
+            <a:r>
+              <a:rPr lang="en-US" sz="1400" dirty="0"/>
+              <a:t> </a:t>
+            </a:r>
+          </a:p>
+          <a:p>
+            <a:r>
+              <a:rPr lang="en-US" sz="1400" dirty="0"/>
+              <a:t>- </a:t>
+            </a:r>
+            <a:r>
+              <a:rPr lang="en-US" sz="1400" dirty="0">
+                <a:hlinkClick r:id="rId6"/>
+              </a:rPr>
+              <a:t>https://medium.com/kubeflow/kubeflow-1-0-cloud-native-ml-for-everyone-a3950202751</a:t>
+            </a:r>
+            <a:r>
+              <a:rPr lang="en-US" sz="1400" dirty="0"/>
+              <a:t> </a:t>
+            </a:r>
+          </a:p>
+        </p:txBody>
+      </p:sp>
+      <p:pic>
+        <p:nvPicPr>
+          <p:cNvPr id="1026" name="Picture 2" descr="Kubeflow - Wikipedia">
+            <a:extLst>
+              <a:ext uri="{FF2B5EF4-FFF2-40B4-BE49-F238E27FC236}">
+                <a16:creationId xmlns:a16="http://schemas.microsoft.com/office/drawing/2014/main" id="{3AD43C98-8B7F-8C4F-8941-8F63A436A61D}"/>
+              </a:ext>
+            </a:extLst>
+          </p:cNvPr>
+          <p:cNvPicPr>
+            <a:picLocks noChangeAspect="1" noChangeArrowheads="1"/>
+          </p:cNvPicPr>
+          <p:nvPr/>
+        </p:nvPicPr>
+        <p:blipFill>
+          <a:blip r:embed="rId7" cstate="email">
+            <a:extLst>
+              <a:ext uri="{28A0092B-C50C-407E-A947-70E740481C1C}">
+                <a14:useLocalDpi xmlns:a14="http://schemas.microsoft.com/office/drawing/2010/main"/>
+              </a:ext>
+            </a:extLst>
+          </a:blip>
+          <a:srcRect/>
+          <a:stretch>
+            <a:fillRect/>
+          </a:stretch>
+        </p:blipFill>
+        <p:spPr bwMode="auto">
+          <a:xfrm>
+            <a:off x="10193334" y="134118"/>
+            <a:ext cx="1855095" cy="1837539"/>
+          </a:xfrm>
+          <a:prstGeom prst="rect">
+            <a:avLst/>
+          </a:prstGeom>
+          <a:noFill/>
+          <a:extLst>
+            <a:ext uri="{909E8E84-426E-40DD-AFC4-6F175D3DCCD1}">
+              <a14:hiddenFill xmlns:a14="http://schemas.microsoft.com/office/drawing/2010/main">
+                <a:solidFill>
+                  <a:srgbClr val="FFFFFF"/>
+                </a:solidFill>
+              </a14:hiddenFill>
+            </a:ext>
+          </a:extLst>
+        </p:spPr>
+      </p:pic>
+      <p:pic>
+        <p:nvPicPr>
+          <p:cNvPr id="6" name="Picture 5">
+            <a:extLst>
+              <a:ext uri="{FF2B5EF4-FFF2-40B4-BE49-F238E27FC236}">
+                <a16:creationId xmlns:a16="http://schemas.microsoft.com/office/drawing/2014/main" id="{9BCD2FDB-EDF7-8447-A2DE-4DF3E99ACB50}"/>
+              </a:ext>
+            </a:extLst>
+          </p:cNvPr>
+          <p:cNvPicPr>
+            <a:picLocks noChangeAspect="1"/>
+          </p:cNvPicPr>
+          <p:nvPr/>
+        </p:nvPicPr>
+        <p:blipFill rotWithShape="1">
+          <a:blip r:embed="rId8" cstate="email">
+            <a:extLst>
+              <a:ext uri="{28A0092B-C50C-407E-A947-70E740481C1C}">
+                <a14:useLocalDpi xmlns:a14="http://schemas.microsoft.com/office/drawing/2010/main"/>
+              </a:ext>
+            </a:extLst>
+          </a:blip>
+          <a:srcRect/>
+          <a:stretch/>
+        </p:blipFill>
+        <p:spPr>
+          <a:xfrm>
+            <a:off x="8049460" y="2586426"/>
+            <a:ext cx="1210541" cy="1467221"/>
+          </a:xfrm>
+          <a:prstGeom prst="rect">
+            <a:avLst/>
+          </a:prstGeom>
+        </p:spPr>
+      </p:pic>
+      <p:sp>
+        <p:nvSpPr>
+          <p:cNvPr id="7" name="TextBox 6">
+            <a:extLst>
+              <a:ext uri="{FF2B5EF4-FFF2-40B4-BE49-F238E27FC236}">
+                <a16:creationId xmlns:a16="http://schemas.microsoft.com/office/drawing/2014/main" id="{F3E12D42-3469-E648-B80D-BA506499F655}"/>
+              </a:ext>
+            </a:extLst>
+          </p:cNvPr>
+          <p:cNvSpPr txBox="1"/>
+          <p:nvPr/>
+        </p:nvSpPr>
+        <p:spPr>
+          <a:xfrm>
+            <a:off x="8049459" y="4053647"/>
+            <a:ext cx="1210541" cy="523220"/>
+          </a:xfrm>
+          <a:prstGeom prst="rect">
+            <a:avLst/>
+          </a:prstGeom>
+          <a:noFill/>
+        </p:spPr>
+        <p:txBody>
+          <a:bodyPr wrap="square" rtlCol="0">
+            <a:spAutoFit/>
+          </a:bodyPr>
+          <a:lstStyle/>
+          <a:p>
+            <a:pPr algn="ctr"/>
+            <a:r>
+              <a:rPr lang="en-US" sz="1400" dirty="0"/>
+              <a:t>Jeremy Lewi</a:t>
+            </a:r>
+            <a:br>
+              <a:rPr lang="en-US" sz="1400" dirty="0"/>
+            </a:br>
+            <a:r>
+              <a:rPr lang="en-US" sz="1400" dirty="0"/>
+              <a:t>Google</a:t>
+            </a:r>
+          </a:p>
+        </p:txBody>
+      </p:sp>
+      <p:pic>
+        <p:nvPicPr>
+          <p:cNvPr id="8" name="Picture 7">
+            <a:extLst>
+              <a:ext uri="{FF2B5EF4-FFF2-40B4-BE49-F238E27FC236}">
+                <a16:creationId xmlns:a16="http://schemas.microsoft.com/office/drawing/2014/main" id="{F6896142-43D8-9948-958B-D9F7568D708B}"/>
+              </a:ext>
+            </a:extLst>
+          </p:cNvPr>
+          <p:cNvPicPr>
+            <a:picLocks noChangeAspect="1"/>
+          </p:cNvPicPr>
+          <p:nvPr/>
+        </p:nvPicPr>
+        <p:blipFill rotWithShape="1">
+          <a:blip r:embed="rId9" cstate="email">
+            <a:extLst>
+              <a:ext uri="{28A0092B-C50C-407E-A947-70E740481C1C}">
+                <a14:useLocalDpi xmlns:a14="http://schemas.microsoft.com/office/drawing/2010/main"/>
+              </a:ext>
+            </a:extLst>
+          </a:blip>
+          <a:srcRect/>
+          <a:stretch/>
+        </p:blipFill>
+        <p:spPr>
+          <a:xfrm>
+            <a:off x="9459672" y="2586426"/>
+            <a:ext cx="1210541" cy="1474497"/>
+          </a:xfrm>
+          <a:prstGeom prst="rect">
+            <a:avLst/>
+          </a:prstGeom>
+        </p:spPr>
+      </p:pic>
+      <p:sp>
+        <p:nvSpPr>
+          <p:cNvPr id="10" name="TextBox 9">
+            <a:extLst>
+              <a:ext uri="{FF2B5EF4-FFF2-40B4-BE49-F238E27FC236}">
+                <a16:creationId xmlns:a16="http://schemas.microsoft.com/office/drawing/2014/main" id="{15E45C24-9E9B-C144-94AF-83EF65642CD4}"/>
+              </a:ext>
+            </a:extLst>
+          </p:cNvPr>
+          <p:cNvSpPr txBox="1"/>
+          <p:nvPr/>
+        </p:nvSpPr>
+        <p:spPr>
+          <a:xfrm>
+            <a:off x="9260000" y="4017462"/>
+            <a:ext cx="1651194" cy="738664"/>
+          </a:xfrm>
+          <a:prstGeom prst="rect">
+            <a:avLst/>
+          </a:prstGeom>
+          <a:noFill/>
+        </p:spPr>
+        <p:txBody>
+          <a:bodyPr wrap="square" rtlCol="0">
+            <a:spAutoFit/>
+          </a:bodyPr>
+          <a:lstStyle/>
+          <a:p>
+            <a:pPr algn="ctr"/>
+            <a:r>
+              <a:rPr lang="en-US" sz="1400" dirty="0"/>
+              <a:t>David </a:t>
+            </a:r>
+            <a:r>
+              <a:rPr lang="en-US" sz="1400" dirty="0" err="1"/>
+              <a:t>Aronchick</a:t>
+            </a:r>
+            <a:br>
+              <a:rPr lang="en-US" sz="1400" dirty="0"/>
+            </a:br>
+            <a:r>
+              <a:rPr lang="en-US" sz="1400" dirty="0"/>
+              <a:t>Microsoft, Azure</a:t>
+            </a:r>
+          </a:p>
+          <a:p>
+            <a:pPr algn="ctr"/>
+            <a:r>
+              <a:rPr lang="en-US" sz="1400" dirty="0"/>
+              <a:t>(originally - Google)</a:t>
+            </a:r>
+          </a:p>
+        </p:txBody>
+      </p:sp>
+      <p:pic>
+        <p:nvPicPr>
+          <p:cNvPr id="9" name="Picture 8">
+            <a:extLst>
+              <a:ext uri="{FF2B5EF4-FFF2-40B4-BE49-F238E27FC236}">
+                <a16:creationId xmlns:a16="http://schemas.microsoft.com/office/drawing/2014/main" id="{4A8C0A57-3399-F641-A3EE-3EA47F248A15}"/>
+              </a:ext>
+            </a:extLst>
+          </p:cNvPr>
+          <p:cNvPicPr>
+            <a:picLocks noChangeAspect="1"/>
+          </p:cNvPicPr>
+          <p:nvPr/>
+        </p:nvPicPr>
+        <p:blipFill rotWithShape="1">
+          <a:blip r:embed="rId10" cstate="email">
+            <a:extLst>
+              <a:ext uri="{28A0092B-C50C-407E-A947-70E740481C1C}">
+                <a14:useLocalDpi xmlns:a14="http://schemas.microsoft.com/office/drawing/2010/main"/>
+              </a:ext>
+            </a:extLst>
+          </a:blip>
+          <a:srcRect/>
+          <a:stretch/>
+        </p:blipFill>
+        <p:spPr>
+          <a:xfrm>
+            <a:off x="10911194" y="2586426"/>
+            <a:ext cx="1137235" cy="1401709"/>
+          </a:xfrm>
+          <a:prstGeom prst="rect">
+            <a:avLst/>
+          </a:prstGeom>
+        </p:spPr>
+      </p:pic>
+      <p:sp>
+        <p:nvSpPr>
+          <p:cNvPr id="12" name="TextBox 11">
+            <a:extLst>
+              <a:ext uri="{FF2B5EF4-FFF2-40B4-BE49-F238E27FC236}">
+                <a16:creationId xmlns:a16="http://schemas.microsoft.com/office/drawing/2014/main" id="{F920D068-A53A-FA4D-A905-8655D1718D68}"/>
+              </a:ext>
+            </a:extLst>
+          </p:cNvPr>
+          <p:cNvSpPr txBox="1"/>
+          <p:nvPr/>
+        </p:nvSpPr>
+        <p:spPr>
+          <a:xfrm>
+            <a:off x="10742609" y="4008638"/>
+            <a:ext cx="1474404" cy="523220"/>
+          </a:xfrm>
+          <a:prstGeom prst="rect">
+            <a:avLst/>
+          </a:prstGeom>
+          <a:noFill/>
+        </p:spPr>
+        <p:txBody>
+          <a:bodyPr wrap="square" rtlCol="0">
+            <a:spAutoFit/>
+          </a:bodyPr>
+          <a:lstStyle/>
+          <a:p>
+            <a:pPr algn="ctr"/>
+            <a:r>
+              <a:rPr lang="en-US" sz="1400" dirty="0"/>
+              <a:t>Vishnu Kannan</a:t>
+            </a:r>
+            <a:br>
+              <a:rPr lang="en-US" sz="1400" dirty="0"/>
+            </a:br>
+            <a:r>
+              <a:rPr lang="en-US" sz="1400" dirty="0"/>
+              <a:t>Google</a:t>
+            </a:r>
+          </a:p>
+        </p:txBody>
+      </p:sp>
+      <p:sp>
+        <p:nvSpPr>
+          <p:cNvPr id="3" name="TextBox 2">
+            <a:extLst>
+              <a:ext uri="{FF2B5EF4-FFF2-40B4-BE49-F238E27FC236}">
+                <a16:creationId xmlns:a16="http://schemas.microsoft.com/office/drawing/2014/main" id="{44415C5E-A93D-6A41-BC79-46FE28C050B5}"/>
+              </a:ext>
+            </a:extLst>
+          </p:cNvPr>
+          <p:cNvSpPr txBox="1"/>
+          <p:nvPr/>
+        </p:nvSpPr>
+        <p:spPr>
+          <a:xfrm>
+            <a:off x="7995210" y="5049320"/>
+            <a:ext cx="4139463" cy="1384995"/>
+          </a:xfrm>
+          <a:prstGeom prst="rect">
+            <a:avLst/>
+          </a:prstGeom>
+          <a:noFill/>
+        </p:spPr>
+        <p:txBody>
+          <a:bodyPr wrap="square" rtlCol="0">
+            <a:spAutoFit/>
+          </a:bodyPr>
+          <a:lstStyle/>
+          <a:p>
+            <a:r>
+              <a:rPr lang="en-US" sz="1400" dirty="0"/>
+              <a:t>David </a:t>
+            </a:r>
+            <a:r>
+              <a:rPr lang="en-US" sz="1400" dirty="0" err="1"/>
+              <a:t>Aronchick</a:t>
+            </a:r>
+            <a:r>
+              <a:rPr lang="en-US" sz="1400" dirty="0"/>
+              <a:t> - Azure, Microsoft (former Google)</a:t>
+            </a:r>
+          </a:p>
+          <a:p>
+            <a:r>
+              <a:rPr lang="en-US" sz="1400" dirty="0"/>
+              <a:t>- </a:t>
+            </a:r>
+            <a:r>
+              <a:rPr lang="en-US" sz="1400" dirty="0">
+                <a:hlinkClick r:id="rId11"/>
+              </a:rPr>
+              <a:t>https://www.linkedin.com/in/aronchick/</a:t>
+            </a:r>
+            <a:r>
+              <a:rPr lang="en-US" sz="1400" dirty="0"/>
+              <a:t> </a:t>
+            </a:r>
+          </a:p>
+          <a:p>
+            <a:r>
+              <a:rPr lang="en-US" sz="1400" dirty="0"/>
+              <a:t>Jeremy Lewi  - Google</a:t>
+            </a:r>
+            <a:br>
+              <a:rPr lang="en-US" sz="1400" dirty="0"/>
+            </a:br>
+            <a:r>
+              <a:rPr lang="en-US" sz="1400" dirty="0"/>
+              <a:t>- </a:t>
+            </a:r>
+            <a:r>
+              <a:rPr lang="en-US" sz="1400" dirty="0">
+                <a:hlinkClick r:id="rId12"/>
+              </a:rPr>
+              <a:t>https://www.linkedin.com/in/jeremy-lewi-600aaa8/</a:t>
+            </a:r>
+            <a:r>
+              <a:rPr lang="en-US" sz="1400" dirty="0"/>
+              <a:t> </a:t>
+            </a:r>
+          </a:p>
+          <a:p>
+            <a:r>
+              <a:rPr lang="en-US" sz="1400" dirty="0"/>
+              <a:t>Vishnu Kannan - Google</a:t>
+            </a:r>
+            <a:br>
+              <a:rPr lang="en-US" sz="1400" dirty="0"/>
+            </a:br>
+            <a:r>
+              <a:rPr lang="en-US" sz="1400" dirty="0"/>
+              <a:t>- </a:t>
+            </a:r>
+            <a:r>
+              <a:rPr lang="en-US" sz="1400" dirty="0">
+                <a:hlinkClick r:id="rId13"/>
+              </a:rPr>
+              <a:t>https://www.linkedin.com/in/vishnukanan/</a:t>
+            </a:r>
+            <a:r>
+              <a:rPr lang="en-US" sz="1400" dirty="0"/>
+              <a:t> </a:t>
+            </a:r>
+          </a:p>
+        </p:txBody>
+      </p:sp>
+      <p:sp>
+        <p:nvSpPr>
+          <p:cNvPr id="14" name="TextBox 13">
+            <a:extLst>
+              <a:ext uri="{FF2B5EF4-FFF2-40B4-BE49-F238E27FC236}">
+                <a16:creationId xmlns:a16="http://schemas.microsoft.com/office/drawing/2014/main" id="{2AC9D7B0-1D67-9740-A6C6-6868C5E0AC3A}"/>
+              </a:ext>
+            </a:extLst>
+          </p:cNvPr>
+          <p:cNvSpPr txBox="1"/>
+          <p:nvPr/>
+        </p:nvSpPr>
+        <p:spPr>
+          <a:xfrm>
+            <a:off x="8190853" y="2253278"/>
+            <a:ext cx="3748178" cy="307777"/>
+          </a:xfrm>
+          <a:prstGeom prst="rect">
+            <a:avLst/>
+          </a:prstGeom>
+          <a:noFill/>
+        </p:spPr>
+        <p:txBody>
+          <a:bodyPr wrap="square" rtlCol="0">
+            <a:spAutoFit/>
+          </a:bodyPr>
+          <a:lstStyle/>
+          <a:p>
+            <a:r>
+              <a:rPr lang="en-US" sz="1400" dirty="0"/>
+              <a:t>Kubeflow was co-founded by Google engineers</a:t>
+            </a:r>
+          </a:p>
+        </p:txBody>
+      </p:sp>
+    </p:spTree>
+    <p:extLst>
+      <p:ext uri="{BB962C8B-B14F-4D97-AF65-F5344CB8AC3E}">
+        <p14:creationId xmlns:p14="http://schemas.microsoft.com/office/powerpoint/2010/main" val="2875421560"/>
       </p:ext>
     </p:extLst>
   </p:cSld>
